--- a/assets/diagram.pptx
+++ b/assets/diagram.pptx
@@ -5,8 +5,9 @@
     <p:sldMasterId id="2147483648" r:id="rId1"/>
   </p:sldMasterIdLst>
   <p:sldIdLst>
-    <p:sldId id="262" r:id="rId2"/>
-    <p:sldId id="263" r:id="rId3"/>
+    <p:sldId id="263" r:id="rId2"/>
+    <p:sldId id="262" r:id="rId3"/>
+    <p:sldId id="264" r:id="rId4"/>
   </p:sldIdLst>
   <p:sldSz cx="12192000" cy="6858000"/>
   <p:notesSz cx="6858000" cy="9144000"/>
@@ -242,7 +243,7 @@
           <a:p>
             <a:fld id="{12922378-5CAE-4291-88F8-B9606E50F830}" type="datetimeFigureOut">
               <a:rPr lang="en-US" smtClean="0"/>
-              <a:t>12/1/2025</a:t>
+              <a:t>9/23/2026</a:t>
             </a:fld>
             <a:endParaRPr lang="en-US"/>
           </a:p>
@@ -410,7 +411,7 @@
           <a:p>
             <a:fld id="{12922378-5CAE-4291-88F8-B9606E50F830}" type="datetimeFigureOut">
               <a:rPr lang="en-US" smtClean="0"/>
-              <a:t>12/1/2025</a:t>
+              <a:t>9/23/2026</a:t>
             </a:fld>
             <a:endParaRPr lang="en-US"/>
           </a:p>
@@ -588,7 +589,7 @@
           <a:p>
             <a:fld id="{12922378-5CAE-4291-88F8-B9606E50F830}" type="datetimeFigureOut">
               <a:rPr lang="en-US" smtClean="0"/>
-              <a:t>12/1/2025</a:t>
+              <a:t>9/23/2026</a:t>
             </a:fld>
             <a:endParaRPr lang="en-US"/>
           </a:p>
@@ -756,7 +757,7 @@
           <a:p>
             <a:fld id="{12922378-5CAE-4291-88F8-B9606E50F830}" type="datetimeFigureOut">
               <a:rPr lang="en-US" smtClean="0"/>
-              <a:t>12/1/2025</a:t>
+              <a:t>9/23/2026</a:t>
             </a:fld>
             <a:endParaRPr lang="en-US"/>
           </a:p>
@@ -1001,7 +1002,7 @@
           <a:p>
             <a:fld id="{12922378-5CAE-4291-88F8-B9606E50F830}" type="datetimeFigureOut">
               <a:rPr lang="en-US" smtClean="0"/>
-              <a:t>12/1/2025</a:t>
+              <a:t>9/23/2026</a:t>
             </a:fld>
             <a:endParaRPr lang="en-US"/>
           </a:p>
@@ -1230,7 +1231,7 @@
           <a:p>
             <a:fld id="{12922378-5CAE-4291-88F8-B9606E50F830}" type="datetimeFigureOut">
               <a:rPr lang="en-US" smtClean="0"/>
-              <a:t>12/1/2025</a:t>
+              <a:t>9/23/2026</a:t>
             </a:fld>
             <a:endParaRPr lang="en-US"/>
           </a:p>
@@ -1594,7 +1595,7 @@
           <a:p>
             <a:fld id="{12922378-5CAE-4291-88F8-B9606E50F830}" type="datetimeFigureOut">
               <a:rPr lang="en-US" smtClean="0"/>
-              <a:t>12/1/2025</a:t>
+              <a:t>9/23/2026</a:t>
             </a:fld>
             <a:endParaRPr lang="en-US"/>
           </a:p>
@@ -1711,7 +1712,7 @@
           <a:p>
             <a:fld id="{12922378-5CAE-4291-88F8-B9606E50F830}" type="datetimeFigureOut">
               <a:rPr lang="en-US" smtClean="0"/>
-              <a:t>12/1/2025</a:t>
+              <a:t>9/23/2026</a:t>
             </a:fld>
             <a:endParaRPr lang="en-US"/>
           </a:p>
@@ -1806,7 +1807,7 @@
           <a:p>
             <a:fld id="{12922378-5CAE-4291-88F8-B9606E50F830}" type="datetimeFigureOut">
               <a:rPr lang="en-US" smtClean="0"/>
-              <a:t>12/1/2025</a:t>
+              <a:t>9/23/2026</a:t>
             </a:fld>
             <a:endParaRPr lang="en-US"/>
           </a:p>
@@ -2081,7 +2082,7 @@
           <a:p>
             <a:fld id="{12922378-5CAE-4291-88F8-B9606E50F830}" type="datetimeFigureOut">
               <a:rPr lang="en-US" smtClean="0"/>
-              <a:t>12/1/2025</a:t>
+              <a:t>9/23/2026</a:t>
             </a:fld>
             <a:endParaRPr lang="en-US"/>
           </a:p>
@@ -2333,7 +2334,7 @@
           <a:p>
             <a:fld id="{12922378-5CAE-4291-88F8-B9606E50F830}" type="datetimeFigureOut">
               <a:rPr lang="en-US" smtClean="0"/>
-              <a:t>12/1/2025</a:t>
+              <a:t>9/23/2026</a:t>
             </a:fld>
             <a:endParaRPr lang="en-US"/>
           </a:p>
@@ -2544,7 +2545,7 @@
           <a:p>
             <a:fld id="{12922378-5CAE-4291-88F8-B9606E50F830}" type="datetimeFigureOut">
               <a:rPr lang="en-US" smtClean="0"/>
-              <a:t>12/1/2025</a:t>
+              <a:t>9/23/2026</a:t>
             </a:fld>
             <a:endParaRPr lang="en-US"/>
           </a:p>
@@ -2951,6 +2952,272 @@
       </p:grpSpPr>
       <p:pic>
         <p:nvPicPr>
+          <p:cNvPr id="8" name="Picture 7" descr="A white heart in a red circle&#10;&#10;AI-generated content may be incorrect.">
+            <a:extLst>
+              <a:ext uri="{FF2B5EF4-FFF2-40B4-BE49-F238E27FC236}">
+                <a16:creationId xmlns:a16="http://schemas.microsoft.com/office/drawing/2014/main" id="{08C150E3-B116-480F-F4E3-DE5F89EB24B9}"/>
+              </a:ext>
+            </a:extLst>
+          </p:cNvPr>
+          <p:cNvPicPr>
+            <a:picLocks noChangeAspect="1"/>
+          </p:cNvPicPr>
+          <p:nvPr/>
+        </p:nvPicPr>
+        <p:blipFill>
+          <a:blip r:embed="rId2">
+            <a:extLst>
+              <a:ext uri="{28A0092B-C50C-407E-A947-70E740481C1C}">
+                <a14:useLocalDpi xmlns:a14="http://schemas.microsoft.com/office/drawing/2010/main" val="0"/>
+              </a:ext>
+            </a:extLst>
+          </a:blip>
+          <a:stretch>
+            <a:fillRect/>
+          </a:stretch>
+        </p:blipFill>
+        <p:spPr>
+          <a:xfrm>
+            <a:off x="2667000" y="0"/>
+            <a:ext cx="6858000" cy="6858000"/>
+          </a:xfrm>
+          <a:prstGeom prst="rect">
+            <a:avLst/>
+          </a:prstGeom>
+        </p:spPr>
+      </p:pic>
+      <p:sp>
+        <p:nvSpPr>
+          <p:cNvPr id="5" name="TextBox 4">
+            <a:extLst>
+              <a:ext uri="{FF2B5EF4-FFF2-40B4-BE49-F238E27FC236}">
+                <a16:creationId xmlns:a16="http://schemas.microsoft.com/office/drawing/2014/main" id="{DDB1CEBF-E2E9-D289-3657-9EF60422276C}"/>
+              </a:ext>
+            </a:extLst>
+          </p:cNvPr>
+          <p:cNvSpPr txBox="1"/>
+          <p:nvPr/>
+        </p:nvSpPr>
+        <p:spPr>
+          <a:xfrm>
+            <a:off x="2667000" y="2282611"/>
+            <a:ext cx="6858000" cy="1692771"/>
+          </a:xfrm>
+          <a:prstGeom prst="rect">
+            <a:avLst/>
+          </a:prstGeom>
+          <a:noFill/>
+        </p:spPr>
+        <p:txBody>
+          <a:bodyPr wrap="square">
+            <a:spAutoFit/>
+          </a:bodyPr>
+          <a:lstStyle/>
+          <a:p>
+            <a:pPr algn="ctr"/>
+            <a:r>
+              <a:rPr lang="en-US" sz="10400" b="1" dirty="0">
+                <a:solidFill>
+                  <a:schemeClr val="bg1">
+                    <a:lumMod val="75000"/>
+                  </a:schemeClr>
+                </a:solidFill>
+                <a:cs typeface="Helvetica" panose="020B0604020202020204" pitchFamily="34" charset="0"/>
+              </a:rPr>
+              <a:t>les</a:t>
+            </a:r>
+            <a:r>
+              <a:rPr lang="en-US" sz="10400" b="1" dirty="0">
+                <a:solidFill>
+                  <a:schemeClr val="accent6"/>
+                </a:solidFill>
+                <a:cs typeface="Helvetica" panose="020B0604020202020204" pitchFamily="34" charset="0"/>
+              </a:rPr>
+              <a:t>s3</a:t>
+            </a:r>
+          </a:p>
+        </p:txBody>
+      </p:sp>
+      <p:cxnSp>
+        <p:nvCxnSpPr>
+          <p:cNvPr id="10" name="Straight Connector 9">
+            <a:extLst>
+              <a:ext uri="{FF2B5EF4-FFF2-40B4-BE49-F238E27FC236}">
+                <a16:creationId xmlns:a16="http://schemas.microsoft.com/office/drawing/2014/main" id="{9BA3A6B8-8DE6-F0C8-424A-ECA48535A2E1}"/>
+              </a:ext>
+            </a:extLst>
+          </p:cNvPr>
+          <p:cNvCxnSpPr/>
+          <p:nvPr/>
+        </p:nvCxnSpPr>
+        <p:spPr>
+          <a:xfrm>
+            <a:off x="2735179" y="0"/>
+            <a:ext cx="0" cy="6761747"/>
+          </a:xfrm>
+          <a:prstGeom prst="line">
+            <a:avLst/>
+          </a:prstGeom>
+        </p:spPr>
+        <p:style>
+          <a:lnRef idx="1">
+            <a:schemeClr val="accent1"/>
+          </a:lnRef>
+          <a:fillRef idx="0">
+            <a:schemeClr val="accent1"/>
+          </a:fillRef>
+          <a:effectRef idx="0">
+            <a:schemeClr val="accent1"/>
+          </a:effectRef>
+          <a:fontRef idx="minor">
+            <a:schemeClr val="tx1"/>
+          </a:fontRef>
+        </p:style>
+      </p:cxnSp>
+      <p:cxnSp>
+        <p:nvCxnSpPr>
+          <p:cNvPr id="11" name="Straight Connector 10">
+            <a:extLst>
+              <a:ext uri="{FF2B5EF4-FFF2-40B4-BE49-F238E27FC236}">
+                <a16:creationId xmlns:a16="http://schemas.microsoft.com/office/drawing/2014/main" id="{C9F9AA84-172E-BEB9-096F-2CA3E9CD5E32}"/>
+              </a:ext>
+            </a:extLst>
+          </p:cNvPr>
+          <p:cNvCxnSpPr/>
+          <p:nvPr/>
+        </p:nvCxnSpPr>
+        <p:spPr>
+          <a:xfrm>
+            <a:off x="9456821" y="48126"/>
+            <a:ext cx="0" cy="6761747"/>
+          </a:xfrm>
+          <a:prstGeom prst="line">
+            <a:avLst/>
+          </a:prstGeom>
+        </p:spPr>
+        <p:style>
+          <a:lnRef idx="1">
+            <a:schemeClr val="accent1"/>
+          </a:lnRef>
+          <a:fillRef idx="0">
+            <a:schemeClr val="accent1"/>
+          </a:fillRef>
+          <a:effectRef idx="0">
+            <a:schemeClr val="accent1"/>
+          </a:effectRef>
+          <a:fontRef idx="minor">
+            <a:schemeClr val="tx1"/>
+          </a:fontRef>
+        </p:style>
+      </p:cxnSp>
+      <p:cxnSp>
+        <p:nvCxnSpPr>
+          <p:cNvPr id="12" name="Straight Connector 11">
+            <a:extLst>
+              <a:ext uri="{FF2B5EF4-FFF2-40B4-BE49-F238E27FC236}">
+                <a16:creationId xmlns:a16="http://schemas.microsoft.com/office/drawing/2014/main" id="{0F351727-33C6-D475-0761-97B098AD2344}"/>
+              </a:ext>
+            </a:extLst>
+          </p:cNvPr>
+          <p:cNvCxnSpPr>
+            <a:cxnSpLocks/>
+          </p:cNvCxnSpPr>
+          <p:nvPr/>
+        </p:nvCxnSpPr>
+        <p:spPr>
+          <a:xfrm>
+            <a:off x="2454442" y="64169"/>
+            <a:ext cx="7435516" cy="0"/>
+          </a:xfrm>
+          <a:prstGeom prst="line">
+            <a:avLst/>
+          </a:prstGeom>
+        </p:spPr>
+        <p:style>
+          <a:lnRef idx="1">
+            <a:schemeClr val="accent1"/>
+          </a:lnRef>
+          <a:fillRef idx="0">
+            <a:schemeClr val="accent1"/>
+          </a:fillRef>
+          <a:effectRef idx="0">
+            <a:schemeClr val="accent1"/>
+          </a:effectRef>
+          <a:fontRef idx="minor">
+            <a:schemeClr val="tx1"/>
+          </a:fontRef>
+        </p:style>
+      </p:cxnSp>
+      <p:cxnSp>
+        <p:nvCxnSpPr>
+          <p:cNvPr id="15" name="Straight Connector 14">
+            <a:extLst>
+              <a:ext uri="{FF2B5EF4-FFF2-40B4-BE49-F238E27FC236}">
+                <a16:creationId xmlns:a16="http://schemas.microsoft.com/office/drawing/2014/main" id="{C7769AA1-46E2-714B-5D08-6D3F2F9FF98C}"/>
+              </a:ext>
+            </a:extLst>
+          </p:cNvPr>
+          <p:cNvCxnSpPr>
+            <a:cxnSpLocks/>
+          </p:cNvCxnSpPr>
+          <p:nvPr/>
+        </p:nvCxnSpPr>
+        <p:spPr>
+          <a:xfrm>
+            <a:off x="2378242" y="6785810"/>
+            <a:ext cx="7435516" cy="0"/>
+          </a:xfrm>
+          <a:prstGeom prst="line">
+            <a:avLst/>
+          </a:prstGeom>
+        </p:spPr>
+        <p:style>
+          <a:lnRef idx="1">
+            <a:schemeClr val="accent1"/>
+          </a:lnRef>
+          <a:fillRef idx="0">
+            <a:schemeClr val="accent1"/>
+          </a:fillRef>
+          <a:effectRef idx="0">
+            <a:schemeClr val="accent1"/>
+          </a:effectRef>
+          <a:fontRef idx="minor">
+            <a:schemeClr val="tx1"/>
+          </a:fontRef>
+        </p:style>
+      </p:cxnSp>
+    </p:spTree>
+    <p:extLst>
+      <p:ext uri="{BB962C8B-B14F-4D97-AF65-F5344CB8AC3E}">
+        <p14:creationId xmlns:p14="http://schemas.microsoft.com/office/powerpoint/2010/main" val="3516967770"/>
+      </p:ext>
+    </p:extLst>
+  </p:cSld>
+  <p:clrMapOvr>
+    <a:masterClrMapping/>
+  </p:clrMapOvr>
+</p:sld>
+</file>
+
+<file path=ppt/slides/slide2.xml><?xml version="1.0" encoding="utf-8"?>
+<p:sld xmlns:a="http://schemas.openxmlformats.org/drawingml/2006/main" xmlns:r="http://schemas.openxmlformats.org/officeDocument/2006/relationships" xmlns:p="http://schemas.openxmlformats.org/presentationml/2006/main">
+  <p:cSld>
+    <p:spTree>
+      <p:nvGrpSpPr>
+        <p:cNvPr id="1" name=""/>
+        <p:cNvGrpSpPr/>
+        <p:nvPr/>
+      </p:nvGrpSpPr>
+      <p:grpSpPr>
+        <a:xfrm>
+          <a:off x="0" y="0"/>
+          <a:ext cx="0" cy="0"/>
+          <a:chOff x="0" y="0"/>
+          <a:chExt cx="0" cy="0"/>
+        </a:xfrm>
+      </p:grpSpPr>
+      <p:pic>
+        <p:nvPicPr>
           <p:cNvPr id="25" name="Picture 16" descr="https://www.trainingliveandonline.com/2013/jpg/Laptop_icon_BW.jpg"/>
           <p:cNvPicPr>
             <a:picLocks noChangeAspect="1" noChangeArrowheads="1"/>
@@ -3396,12 +3663,18 @@
 </p:sld>
 </file>
 
-<file path=ppt/slides/slide2.xml><?xml version="1.0" encoding="utf-8"?>
+<file path=ppt/slides/slide3.xml><?xml version="1.0" encoding="utf-8"?>
 <p:sld xmlns:a="http://schemas.openxmlformats.org/drawingml/2006/main" xmlns:r="http://schemas.openxmlformats.org/officeDocument/2006/relationships" xmlns:p="http://schemas.openxmlformats.org/presentationml/2006/main">
   <p:cSld>
     <p:spTree>
       <p:nvGrpSpPr>
-        <p:cNvPr id="1" name=""/>
+        <p:cNvPr id="1" name="">
+          <a:extLst>
+            <a:ext uri="{FF2B5EF4-FFF2-40B4-BE49-F238E27FC236}">
+              <a16:creationId xmlns:a16="http://schemas.microsoft.com/office/drawing/2014/main" id="{C40AE580-6220-7D16-0386-1E7BD3DDA48F}"/>
+            </a:ext>
+          </a:extLst>
+        </p:cNvPr>
         <p:cNvGrpSpPr/>
         <p:nvPr/>
       </p:nvGrpSpPr>
@@ -3413,114 +3686,94 @@
           <a:chExt cx="0" cy="0"/>
         </a:xfrm>
       </p:grpSpPr>
-      <p:pic>
-        <p:nvPicPr>
-          <p:cNvPr id="8" name="Picture 7" descr="A white heart in a red circle&#10;&#10;AI-generated content may be incorrect.">
+      <p:sp>
+        <p:nvSpPr>
+          <p:cNvPr id="2" name="Rectangle: Rounded Corners 1">
             <a:extLst>
               <a:ext uri="{FF2B5EF4-FFF2-40B4-BE49-F238E27FC236}">
-                <a16:creationId xmlns:a16="http://schemas.microsoft.com/office/drawing/2014/main" id="{08C150E3-B116-480F-F4E3-DE5F89EB24B9}"/>
+                <a16:creationId xmlns:a16="http://schemas.microsoft.com/office/drawing/2014/main" id="{EBF895D2-E293-9F24-8E03-178965DA5B7C}"/>
               </a:ext>
             </a:extLst>
           </p:cNvPr>
-          <p:cNvPicPr>
-            <a:picLocks noChangeAspect="1"/>
-          </p:cNvPicPr>
+          <p:cNvSpPr/>
           <p:nvPr/>
-        </p:nvPicPr>
-        <p:blipFill>
-          <a:blip r:embed="rId2">
-            <a:extLst>
-              <a:ext uri="{28A0092B-C50C-407E-A947-70E740481C1C}">
-                <a14:useLocalDpi xmlns:a14="http://schemas.microsoft.com/office/drawing/2010/main" val="0"/>
-              </a:ext>
-            </a:extLst>
-          </a:blip>
-          <a:stretch>
-            <a:fillRect/>
-          </a:stretch>
-        </p:blipFill>
-        <p:spPr>
-          <a:xfrm>
-            <a:off x="2667000" y="0"/>
-            <a:ext cx="6858000" cy="6858000"/>
-          </a:xfrm>
-          <a:prstGeom prst="rect">
-            <a:avLst/>
+        </p:nvSpPr>
+        <p:spPr>
+          <a:xfrm>
+            <a:off x="602166" y="1345580"/>
+            <a:ext cx="2416800" cy="3669672"/>
+          </a:xfrm>
+          <a:prstGeom prst="roundRect">
+            <a:avLst>
+              <a:gd name="adj" fmla="val 2476"/>
+            </a:avLst>
           </a:prstGeom>
-        </p:spPr>
-      </p:pic>
-      <p:sp>
-        <p:nvSpPr>
-          <p:cNvPr id="5" name="TextBox 4">
+          <a:solidFill>
+            <a:schemeClr val="bg1">
+              <a:lumMod val="85000"/>
+            </a:schemeClr>
+          </a:solidFill>
+          <a:ln>
+            <a:noFill/>
+          </a:ln>
+        </p:spPr>
+        <p:style>
+          <a:lnRef idx="2">
+            <a:schemeClr val="accent1">
+              <a:shade val="15000"/>
+            </a:schemeClr>
+          </a:lnRef>
+          <a:fillRef idx="1">
+            <a:schemeClr val="accent1"/>
+          </a:fillRef>
+          <a:effectRef idx="0">
+            <a:schemeClr val="accent1"/>
+          </a:effectRef>
+          <a:fontRef idx="minor">
+            <a:schemeClr val="lt1"/>
+          </a:fontRef>
+        </p:style>
+        <p:txBody>
+          <a:bodyPr rtlCol="0" anchor="ctr"/>
+          <a:lstStyle/>
+          <a:p>
+            <a:pPr algn="ctr"/>
+            <a:endParaRPr lang="en-US"/>
+          </a:p>
+        </p:txBody>
+      </p:sp>
+      <p:cxnSp>
+        <p:nvCxnSpPr>
+          <p:cNvPr id="62" name="Straight Arrow Connector 61">
             <a:extLst>
               <a:ext uri="{FF2B5EF4-FFF2-40B4-BE49-F238E27FC236}">
-                <a16:creationId xmlns:a16="http://schemas.microsoft.com/office/drawing/2014/main" id="{DDB1CEBF-E2E9-D289-3657-9EF60422276C}"/>
+                <a16:creationId xmlns:a16="http://schemas.microsoft.com/office/drawing/2014/main" id="{E0FC6743-92C4-C650-F5BD-12ED0C32EE9A}"/>
               </a:ext>
             </a:extLst>
           </p:cNvPr>
-          <p:cNvSpPr txBox="1"/>
+          <p:cNvCxnSpPr>
+            <a:cxnSpLocks/>
+          </p:cNvCxnSpPr>
           <p:nvPr/>
-        </p:nvSpPr>
-        <p:spPr>
-          <a:xfrm>
-            <a:off x="2667000" y="2282611"/>
-            <a:ext cx="6858000" cy="1692771"/>
-          </a:xfrm>
-          <a:prstGeom prst="rect">
+        </p:nvCxnSpPr>
+        <p:spPr>
+          <a:xfrm flipH="1">
+            <a:off x="3018966" y="3133919"/>
+            <a:ext cx="877396" cy="0"/>
+          </a:xfrm>
+          <a:prstGeom prst="straightConnector1">
             <a:avLst/>
           </a:prstGeom>
-          <a:noFill/>
-        </p:spPr>
-        <p:txBody>
-          <a:bodyPr wrap="square">
-            <a:spAutoFit/>
-          </a:bodyPr>
-          <a:lstStyle/>
-          <a:p>
-            <a:pPr algn="ctr"/>
-            <a:r>
-              <a:rPr lang="en-US" sz="10400" b="1" dirty="0">
-                <a:solidFill>
-                  <a:schemeClr val="bg1">
-                    <a:lumMod val="75000"/>
-                  </a:schemeClr>
-                </a:solidFill>
-                <a:cs typeface="Helvetica" panose="020B0604020202020204" pitchFamily="34" charset="0"/>
-              </a:rPr>
-              <a:t>les</a:t>
-            </a:r>
-            <a:r>
-              <a:rPr lang="en-US" sz="10400" b="1" dirty="0">
-                <a:solidFill>
-                  <a:schemeClr val="accent6"/>
-                </a:solidFill>
-                <a:cs typeface="Helvetica" panose="020B0604020202020204" pitchFamily="34" charset="0"/>
-              </a:rPr>
-              <a:t>s3</a:t>
-            </a:r>
-          </a:p>
-        </p:txBody>
-      </p:sp>
-      <p:cxnSp>
-        <p:nvCxnSpPr>
-          <p:cNvPr id="10" name="Straight Connector 9">
-            <a:extLst>
-              <a:ext uri="{FF2B5EF4-FFF2-40B4-BE49-F238E27FC236}">
-                <a16:creationId xmlns:a16="http://schemas.microsoft.com/office/drawing/2014/main" id="{9BA3A6B8-8DE6-F0C8-424A-ECA48535A2E1}"/>
-              </a:ext>
-            </a:extLst>
-          </p:cNvPr>
-          <p:cNvCxnSpPr/>
-          <p:nvPr/>
-        </p:nvCxnSpPr>
-        <p:spPr>
-          <a:xfrm>
-            <a:off x="2735179" y="0"/>
-            <a:ext cx="0" cy="6761747"/>
-          </a:xfrm>
-          <a:prstGeom prst="line">
-            <a:avLst/>
-          </a:prstGeom>
+          <a:ln w="50800">
+            <a:solidFill>
+              <a:schemeClr val="tx1">
+                <a:lumMod val="75000"/>
+                <a:lumOff val="25000"/>
+              </a:schemeClr>
+            </a:solidFill>
+            <a:headEnd type="triangle"/>
+            <a:tailEnd type="triangle"/>
+          </a:ln>
         </p:spPr>
         <p:style>
           <a:lnRef idx="1">
@@ -3539,24 +3792,36 @@
       </p:cxnSp>
       <p:cxnSp>
         <p:nvCxnSpPr>
-          <p:cNvPr id="11" name="Straight Connector 10">
+          <p:cNvPr id="83" name="Straight Arrow Connector 82">
             <a:extLst>
               <a:ext uri="{FF2B5EF4-FFF2-40B4-BE49-F238E27FC236}">
-                <a16:creationId xmlns:a16="http://schemas.microsoft.com/office/drawing/2014/main" id="{C9F9AA84-172E-BEB9-096F-2CA3E9CD5E32}"/>
+                <a16:creationId xmlns:a16="http://schemas.microsoft.com/office/drawing/2014/main" id="{B69F8C35-F65A-C445-0D33-16CB5D435068}"/>
               </a:ext>
             </a:extLst>
           </p:cNvPr>
-          <p:cNvCxnSpPr/>
+          <p:cNvCxnSpPr>
+            <a:cxnSpLocks/>
+          </p:cNvCxnSpPr>
           <p:nvPr/>
         </p:nvCxnSpPr>
         <p:spPr>
-          <a:xfrm>
-            <a:off x="9456821" y="48126"/>
-            <a:ext cx="0" cy="6761747"/>
-          </a:xfrm>
-          <a:prstGeom prst="line">
+          <a:xfrm flipH="1">
+            <a:off x="7526797" y="3109129"/>
+            <a:ext cx="872574" cy="0"/>
+          </a:xfrm>
+          <a:prstGeom prst="straightConnector1">
             <a:avLst/>
           </a:prstGeom>
+          <a:ln w="50800">
+            <a:solidFill>
+              <a:schemeClr val="tx1">
+                <a:lumMod val="75000"/>
+                <a:lumOff val="25000"/>
+              </a:schemeClr>
+            </a:solidFill>
+            <a:headEnd type="triangle"/>
+            <a:tailEnd type="triangle"/>
+          </a:ln>
         </p:spPr>
         <p:style>
           <a:lnRef idx="1">
@@ -3573,86 +3838,878 @@
           </a:fontRef>
         </p:style>
       </p:cxnSp>
-      <p:cxnSp>
-        <p:nvCxnSpPr>
-          <p:cNvPr id="12" name="Straight Connector 11">
+      <p:sp>
+        <p:nvSpPr>
+          <p:cNvPr id="85" name="TextBox 84">
             <a:extLst>
               <a:ext uri="{FF2B5EF4-FFF2-40B4-BE49-F238E27FC236}">
-                <a16:creationId xmlns:a16="http://schemas.microsoft.com/office/drawing/2014/main" id="{0F351727-33C6-D475-0761-97B098AD2344}"/>
+                <a16:creationId xmlns:a16="http://schemas.microsoft.com/office/drawing/2014/main" id="{F47CAF6E-89DD-0F6C-B39F-81B5024C91C4}"/>
               </a:ext>
             </a:extLst>
           </p:cNvPr>
-          <p:cNvCxnSpPr>
-            <a:cxnSpLocks/>
-          </p:cNvCxnSpPr>
+          <p:cNvSpPr txBox="1"/>
           <p:nvPr/>
-        </p:nvCxnSpPr>
-        <p:spPr>
-          <a:xfrm>
-            <a:off x="2454442" y="64169"/>
-            <a:ext cx="7435516" cy="0"/>
-          </a:xfrm>
-          <a:prstGeom prst="line">
+        </p:nvSpPr>
+        <p:spPr>
+          <a:xfrm>
+            <a:off x="3105203" y="3225065"/>
+            <a:ext cx="723194" cy="230832"/>
+          </a:xfrm>
+          <a:prstGeom prst="rect">
             <a:avLst/>
           </a:prstGeom>
+          <a:solidFill>
+            <a:schemeClr val="bg1">
+              <a:lumMod val="75000"/>
+            </a:schemeClr>
+          </a:solidFill>
+        </p:spPr>
+        <p:txBody>
+          <a:bodyPr wrap="square" rtlCol="0">
+            <a:spAutoFit/>
+          </a:bodyPr>
+          <a:lstStyle/>
+          <a:p>
+            <a:pPr algn="ctr"/>
+            <a:r>
+              <a:rPr lang="en-US" sz="900" dirty="0"/>
+              <a:t>AWS SDK</a:t>
+            </a:r>
+            <a:endParaRPr lang="en-US" sz="900" i="1" dirty="0"/>
+          </a:p>
+        </p:txBody>
+      </p:sp>
+      <p:pic>
+        <p:nvPicPr>
+          <p:cNvPr id="6" name="Picture 5" descr="Laptop - Free computer icons">
+            <a:extLst>
+              <a:ext uri="{FF2B5EF4-FFF2-40B4-BE49-F238E27FC236}">
+                <a16:creationId xmlns:a16="http://schemas.microsoft.com/office/drawing/2014/main" id="{7ABF50F3-43DA-7FD3-E2C9-1CB7BABCAF6C}"/>
+              </a:ext>
+            </a:extLst>
+          </p:cNvPr>
+          <p:cNvPicPr>
+            <a:picLocks noChangeAspect="1"/>
+          </p:cNvPicPr>
+          <p:nvPr/>
+        </p:nvPicPr>
+        <p:blipFill>
+          <a:blip r:embed="rId2"/>
+          <a:stretch>
+            <a:fillRect/>
+          </a:stretch>
+        </p:blipFill>
+        <p:spPr>
+          <a:xfrm>
+            <a:off x="1407377" y="1813031"/>
+            <a:ext cx="831790" cy="831790"/>
+          </a:xfrm>
+          <a:prstGeom prst="rect">
+            <a:avLst/>
+          </a:prstGeom>
+        </p:spPr>
+      </p:pic>
+      <p:sp>
+        <p:nvSpPr>
+          <p:cNvPr id="8" name="TextBox 7">
+            <a:extLst>
+              <a:ext uri="{FF2B5EF4-FFF2-40B4-BE49-F238E27FC236}">
+                <a16:creationId xmlns:a16="http://schemas.microsoft.com/office/drawing/2014/main" id="{7D1663D3-FB18-EE36-283D-B38718F31D4F}"/>
+              </a:ext>
+            </a:extLst>
+          </p:cNvPr>
+          <p:cNvSpPr txBox="1"/>
+          <p:nvPr/>
+        </p:nvSpPr>
+        <p:spPr>
+          <a:xfrm>
+            <a:off x="796240" y="1346010"/>
+            <a:ext cx="2028651" cy="276999"/>
+          </a:xfrm>
+          <a:prstGeom prst="rect">
+            <a:avLst/>
+          </a:prstGeom>
+          <a:noFill/>
+          <a:ln>
+            <a:noFill/>
+          </a:ln>
+        </p:spPr>
+        <p:txBody>
+          <a:bodyPr wrap="square" rtlCol="0">
+            <a:spAutoFit/>
+          </a:bodyPr>
+          <a:lstStyle/>
+          <a:p>
+            <a:pPr algn="ctr"/>
+            <a:r>
+              <a:rPr lang="en-US" sz="1200" dirty="0"/>
+              <a:t>Clients, Servers, and Agents</a:t>
+            </a:r>
+            <a:endParaRPr lang="en-US" sz="1200" i="1" dirty="0"/>
+          </a:p>
+        </p:txBody>
+      </p:sp>
+      <p:pic>
+        <p:nvPicPr>
+          <p:cNvPr id="9" name="Picture 8" descr="Servers - free Icon PNG, SVG">
+            <a:extLst>
+              <a:ext uri="{FF2B5EF4-FFF2-40B4-BE49-F238E27FC236}">
+                <a16:creationId xmlns:a16="http://schemas.microsoft.com/office/drawing/2014/main" id="{C8F9E347-CDA7-FE70-258D-E5A721FE6483}"/>
+              </a:ext>
+            </a:extLst>
+          </p:cNvPr>
+          <p:cNvPicPr>
+            <a:picLocks noChangeAspect="1"/>
+          </p:cNvPicPr>
+          <p:nvPr/>
+        </p:nvPicPr>
+        <p:blipFill>
+          <a:blip r:embed="rId3"/>
+          <a:stretch>
+            <a:fillRect/>
+          </a:stretch>
+        </p:blipFill>
+        <p:spPr>
+          <a:xfrm>
+            <a:off x="1149973" y="2538266"/>
+            <a:ext cx="1366855" cy="1366855"/>
+          </a:xfrm>
+          <a:prstGeom prst="rect">
+            <a:avLst/>
+          </a:prstGeom>
+        </p:spPr>
+      </p:pic>
+      <p:pic>
+        <p:nvPicPr>
+          <p:cNvPr id="10" name="Picture 9" descr="Ai assistant - Free technology icons">
+            <a:extLst>
+              <a:ext uri="{FF2B5EF4-FFF2-40B4-BE49-F238E27FC236}">
+                <a16:creationId xmlns:a16="http://schemas.microsoft.com/office/drawing/2014/main" id="{DD274602-E6CB-333F-8B1B-66C384823A0D}"/>
+              </a:ext>
+            </a:extLst>
+          </p:cNvPr>
+          <p:cNvPicPr>
+            <a:picLocks noChangeAspect="1"/>
+          </p:cNvPicPr>
+          <p:nvPr/>
+        </p:nvPicPr>
+        <p:blipFill>
+          <a:blip r:embed="rId4"/>
+          <a:stretch>
+            <a:fillRect/>
+          </a:stretch>
+        </p:blipFill>
+        <p:spPr>
+          <a:xfrm>
+            <a:off x="1451268" y="3880376"/>
+            <a:ext cx="753524" cy="753524"/>
+          </a:xfrm>
+          <a:prstGeom prst="rect">
+            <a:avLst/>
+          </a:prstGeom>
+        </p:spPr>
+      </p:pic>
+      <p:sp>
+        <p:nvSpPr>
+          <p:cNvPr id="12" name="Rectangle: Rounded Corners 11">
+            <a:extLst>
+              <a:ext uri="{FF2B5EF4-FFF2-40B4-BE49-F238E27FC236}">
+                <a16:creationId xmlns:a16="http://schemas.microsoft.com/office/drawing/2014/main" id="{274EDFC8-BE13-9169-689F-E5ED0FB108B4}"/>
+              </a:ext>
+            </a:extLst>
+          </p:cNvPr>
+          <p:cNvSpPr/>
+          <p:nvPr/>
+        </p:nvSpPr>
+        <p:spPr>
+          <a:xfrm>
+            <a:off x="3910036" y="1355748"/>
+            <a:ext cx="3616761" cy="3669672"/>
+          </a:xfrm>
+          <a:prstGeom prst="roundRect">
+            <a:avLst>
+              <a:gd name="adj" fmla="val 2262"/>
+            </a:avLst>
+          </a:prstGeom>
+          <a:solidFill>
+            <a:schemeClr val="bg1">
+              <a:lumMod val="85000"/>
+            </a:schemeClr>
+          </a:solidFill>
+          <a:ln>
+            <a:noFill/>
+          </a:ln>
         </p:spPr>
         <p:style>
-          <a:lnRef idx="1">
-            <a:schemeClr val="accent1"/>
+          <a:lnRef idx="2">
+            <a:schemeClr val="accent1">
+              <a:shade val="15000"/>
+            </a:schemeClr>
           </a:lnRef>
-          <a:fillRef idx="0">
+          <a:fillRef idx="1">
             <a:schemeClr val="accent1"/>
           </a:fillRef>
           <a:effectRef idx="0">
             <a:schemeClr val="accent1"/>
           </a:effectRef>
           <a:fontRef idx="minor">
-            <a:schemeClr val="tx1"/>
+            <a:schemeClr val="lt1"/>
           </a:fontRef>
         </p:style>
-      </p:cxnSp>
-      <p:cxnSp>
-        <p:nvCxnSpPr>
-          <p:cNvPr id="15" name="Straight Connector 14">
+        <p:txBody>
+          <a:bodyPr rtlCol="0" anchor="ctr"/>
+          <a:lstStyle/>
+          <a:p>
+            <a:pPr algn="ctr"/>
+            <a:endParaRPr lang="en-US"/>
+          </a:p>
+        </p:txBody>
+      </p:sp>
+      <p:sp>
+        <p:nvSpPr>
+          <p:cNvPr id="14" name="TextBox 13">
             <a:extLst>
               <a:ext uri="{FF2B5EF4-FFF2-40B4-BE49-F238E27FC236}">
-                <a16:creationId xmlns:a16="http://schemas.microsoft.com/office/drawing/2014/main" id="{C7769AA1-46E2-714B-5D08-6D3F2F9FF98C}"/>
+                <a16:creationId xmlns:a16="http://schemas.microsoft.com/office/drawing/2014/main" id="{7AEAD546-B5A2-69F2-EBB4-8B54AA2F63E9}"/>
               </a:ext>
             </a:extLst>
           </p:cNvPr>
-          <p:cNvCxnSpPr>
-            <a:cxnSpLocks/>
-          </p:cNvCxnSpPr>
+          <p:cNvSpPr txBox="1"/>
           <p:nvPr/>
-        </p:nvCxnSpPr>
-        <p:spPr>
-          <a:xfrm>
-            <a:off x="2378242" y="6785810"/>
-            <a:ext cx="7435516" cy="0"/>
-          </a:xfrm>
-          <a:prstGeom prst="line">
+        </p:nvSpPr>
+        <p:spPr>
+          <a:xfrm>
+            <a:off x="4704090" y="1355748"/>
+            <a:ext cx="2028651" cy="276999"/>
+          </a:xfrm>
+          <a:prstGeom prst="rect">
             <a:avLst/>
           </a:prstGeom>
-        </p:spPr>
-        <p:style>
-          <a:lnRef idx="1">
-            <a:schemeClr val="accent1"/>
-          </a:lnRef>
-          <a:fillRef idx="0">
-            <a:schemeClr val="accent1"/>
-          </a:fillRef>
-          <a:effectRef idx="0">
-            <a:schemeClr val="accent1"/>
-          </a:effectRef>
-          <a:fontRef idx="minor">
-            <a:schemeClr val="tx1"/>
-          </a:fontRef>
-        </p:style>
-      </p:cxnSp>
+          <a:noFill/>
+          <a:ln>
+            <a:noFill/>
+          </a:ln>
+        </p:spPr>
+        <p:txBody>
+          <a:bodyPr wrap="square" rtlCol="0">
+            <a:spAutoFit/>
+          </a:bodyPr>
+          <a:lstStyle/>
+          <a:p>
+            <a:pPr algn="ctr"/>
+            <a:r>
+              <a:rPr lang="en-US" sz="1200" dirty="0"/>
+              <a:t>Container Infrastructure</a:t>
+            </a:r>
+            <a:endParaRPr lang="en-US" sz="1200" i="1" dirty="0"/>
+          </a:p>
+        </p:txBody>
+      </p:sp>
+      <p:pic>
+        <p:nvPicPr>
+          <p:cNvPr id="15" name="Picture 14" descr="Load Balancer Icons - Free SVG &amp; PNG Load Balancer Images - Noun Project">
+            <a:extLst>
+              <a:ext uri="{FF2B5EF4-FFF2-40B4-BE49-F238E27FC236}">
+                <a16:creationId xmlns:a16="http://schemas.microsoft.com/office/drawing/2014/main" id="{F75B04F9-657B-F631-9EB1-547429A90AFD}"/>
+              </a:ext>
+            </a:extLst>
+          </p:cNvPr>
+          <p:cNvPicPr>
+            <a:picLocks noChangeAspect="1"/>
+          </p:cNvPicPr>
+          <p:nvPr/>
+        </p:nvPicPr>
+        <p:blipFill>
+          <a:blip r:embed="rId5"/>
+          <a:stretch>
+            <a:fillRect/>
+          </a:stretch>
+        </p:blipFill>
+        <p:spPr>
+          <a:xfrm>
+            <a:off x="4073831" y="2759716"/>
+            <a:ext cx="748406" cy="748406"/>
+          </a:xfrm>
+          <a:prstGeom prst="rect">
+            <a:avLst/>
+          </a:prstGeom>
+        </p:spPr>
+      </p:pic>
+      <p:sp>
+        <p:nvSpPr>
+          <p:cNvPr id="17" name="TextBox 16">
+            <a:extLst>
+              <a:ext uri="{FF2B5EF4-FFF2-40B4-BE49-F238E27FC236}">
+                <a16:creationId xmlns:a16="http://schemas.microsoft.com/office/drawing/2014/main" id="{90216491-39DA-275D-70EA-B73471DF1180}"/>
+              </a:ext>
+            </a:extLst>
+          </p:cNvPr>
+          <p:cNvSpPr txBox="1"/>
+          <p:nvPr/>
+        </p:nvSpPr>
+        <p:spPr>
+          <a:xfrm>
+            <a:off x="4088526" y="3455897"/>
+            <a:ext cx="841500" cy="400110"/>
+          </a:xfrm>
+          <a:prstGeom prst="rect">
+            <a:avLst/>
+          </a:prstGeom>
+          <a:noFill/>
+          <a:ln>
+            <a:noFill/>
+          </a:ln>
+        </p:spPr>
+        <p:txBody>
+          <a:bodyPr wrap="square" rtlCol="0">
+            <a:spAutoFit/>
+          </a:bodyPr>
+          <a:lstStyle/>
+          <a:p>
+            <a:pPr algn="ctr"/>
+            <a:r>
+              <a:rPr lang="en-US" sz="1000" dirty="0"/>
+              <a:t>Load</a:t>
+            </a:r>
+            <a:br>
+              <a:rPr lang="en-US" sz="1000" dirty="0"/>
+            </a:br>
+            <a:r>
+              <a:rPr lang="en-US" sz="1000" dirty="0"/>
+              <a:t>Balancer</a:t>
+            </a:r>
+            <a:endParaRPr lang="en-US" sz="1000" i="1" dirty="0"/>
+          </a:p>
+        </p:txBody>
+      </p:sp>
+      <p:grpSp>
+        <p:nvGrpSpPr>
+          <p:cNvPr id="44" name="Group 43">
+            <a:extLst>
+              <a:ext uri="{FF2B5EF4-FFF2-40B4-BE49-F238E27FC236}">
+                <a16:creationId xmlns:a16="http://schemas.microsoft.com/office/drawing/2014/main" id="{315DE0C9-DAED-B300-C9FB-72CF8B6E2CDA}"/>
+              </a:ext>
+            </a:extLst>
+          </p:cNvPr>
+          <p:cNvGrpSpPr/>
+          <p:nvPr/>
+        </p:nvGrpSpPr>
+        <p:grpSpPr>
+          <a:xfrm>
+            <a:off x="4999193" y="2054171"/>
+            <a:ext cx="1239422" cy="1170894"/>
+            <a:chOff x="2500556" y="2775030"/>
+            <a:chExt cx="1588844" cy="1588844"/>
+          </a:xfrm>
+        </p:grpSpPr>
+        <p:pic>
+          <p:nvPicPr>
+            <p:cNvPr id="53" name="Picture 4" descr="https://camo.githubusercontent.com/b76dc5557c7cb56ba35b63e709647c11fecae40e/68747470733a2f2f662e636c6f75642e6769746875622e636f6d2f6173736574732f3130383335382f313735373236302f33626332386264342d363637652d313165332d383837632d3231393533633635303261662e706e67">
+              <a:extLst>
+                <a:ext uri="{FF2B5EF4-FFF2-40B4-BE49-F238E27FC236}">
+                  <a16:creationId xmlns:a16="http://schemas.microsoft.com/office/drawing/2014/main" id="{F85EBDB4-1BF3-1160-5B91-8CD743807E8C}"/>
+                </a:ext>
+              </a:extLst>
+            </p:cNvPr>
+            <p:cNvPicPr>
+              <a:picLocks noChangeAspect="1" noChangeArrowheads="1"/>
+            </p:cNvPicPr>
+            <p:nvPr/>
+          </p:nvPicPr>
+          <p:blipFill>
+            <a:blip r:embed="rId6" cstate="print">
+              <a:extLst>
+                <a:ext uri="{28A0092B-C50C-407E-A947-70E740481C1C}">
+                  <a14:useLocalDpi xmlns:a14="http://schemas.microsoft.com/office/drawing/2010/main" val="0"/>
+                </a:ext>
+              </a:extLst>
+            </a:blip>
+            <a:srcRect/>
+            <a:stretch>
+              <a:fillRect/>
+            </a:stretch>
+          </p:blipFill>
+          <p:spPr bwMode="auto">
+            <a:xfrm>
+              <a:off x="2500556" y="2775030"/>
+              <a:ext cx="1588844" cy="1588844"/>
+            </a:xfrm>
+            <a:prstGeom prst="rect">
+              <a:avLst/>
+            </a:prstGeom>
+            <a:noFill/>
+            <a:extLst>
+              <a:ext uri="{909E8E84-426E-40DD-AFC4-6F175D3DCCD1}">
+                <a14:hiddenFill xmlns:a14="http://schemas.microsoft.com/office/drawing/2010/main">
+                  <a:solidFill>
+                    <a:srgbClr val="FFFFFF"/>
+                  </a:solidFill>
+                </a14:hiddenFill>
+              </a:ext>
+            </a:extLst>
+          </p:spPr>
+        </p:pic>
+        <p:pic>
+          <p:nvPicPr>
+            <p:cNvPr id="55" name="Picture 54">
+              <a:extLst>
+                <a:ext uri="{FF2B5EF4-FFF2-40B4-BE49-F238E27FC236}">
+                  <a16:creationId xmlns:a16="http://schemas.microsoft.com/office/drawing/2014/main" id="{ED78A37C-F733-D3AD-734D-C97EC2ABA119}"/>
+                </a:ext>
+              </a:extLst>
+            </p:cNvPr>
+            <p:cNvPicPr>
+              <a:picLocks noChangeAspect="1"/>
+            </p:cNvPicPr>
+            <p:nvPr/>
+          </p:nvPicPr>
+          <p:blipFill>
+            <a:blip r:embed="rId7" cstate="print">
+              <a:extLst>
+                <a:ext uri="{28A0092B-C50C-407E-A947-70E740481C1C}">
+                  <a14:useLocalDpi xmlns:a14="http://schemas.microsoft.com/office/drawing/2010/main" val="0"/>
+                </a:ext>
+              </a:extLst>
+            </a:blip>
+            <a:stretch>
+              <a:fillRect/>
+            </a:stretch>
+          </p:blipFill>
+          <p:spPr>
+            <a:xfrm>
+              <a:off x="3066101" y="3053647"/>
+              <a:ext cx="499536" cy="499536"/>
+            </a:xfrm>
+            <a:prstGeom prst="rect">
+              <a:avLst/>
+            </a:prstGeom>
+          </p:spPr>
+        </p:pic>
+      </p:grpSp>
+      <p:grpSp>
+        <p:nvGrpSpPr>
+          <p:cNvPr id="18" name="Group 17">
+            <a:extLst>
+              <a:ext uri="{FF2B5EF4-FFF2-40B4-BE49-F238E27FC236}">
+                <a16:creationId xmlns:a16="http://schemas.microsoft.com/office/drawing/2014/main" id="{2E39065C-A096-49A7-54AD-AC092E6D6F78}"/>
+              </a:ext>
+            </a:extLst>
+          </p:cNvPr>
+          <p:cNvGrpSpPr/>
+          <p:nvPr/>
+        </p:nvGrpSpPr>
+        <p:grpSpPr>
+          <a:xfrm>
+            <a:off x="4985518" y="2752594"/>
+            <a:ext cx="1239422" cy="1170894"/>
+            <a:chOff x="2500556" y="2775030"/>
+            <a:chExt cx="1588844" cy="1588844"/>
+          </a:xfrm>
+        </p:grpSpPr>
+        <p:pic>
+          <p:nvPicPr>
+            <p:cNvPr id="19" name="Picture 4" descr="https://camo.githubusercontent.com/b76dc5557c7cb56ba35b63e709647c11fecae40e/68747470733a2f2f662e636c6f75642e6769746875622e636f6d2f6173736574732f3130383335382f313735373236302f33626332386264342d363637652d313165332d383837632d3231393533633635303261662e706e67">
+              <a:extLst>
+                <a:ext uri="{FF2B5EF4-FFF2-40B4-BE49-F238E27FC236}">
+                  <a16:creationId xmlns:a16="http://schemas.microsoft.com/office/drawing/2014/main" id="{98AA9B4D-3437-17D0-0348-258F75017768}"/>
+                </a:ext>
+              </a:extLst>
+            </p:cNvPr>
+            <p:cNvPicPr>
+              <a:picLocks noChangeAspect="1" noChangeArrowheads="1"/>
+            </p:cNvPicPr>
+            <p:nvPr/>
+          </p:nvPicPr>
+          <p:blipFill>
+            <a:blip r:embed="rId6" cstate="print">
+              <a:extLst>
+                <a:ext uri="{28A0092B-C50C-407E-A947-70E740481C1C}">
+                  <a14:useLocalDpi xmlns:a14="http://schemas.microsoft.com/office/drawing/2010/main" val="0"/>
+                </a:ext>
+              </a:extLst>
+            </a:blip>
+            <a:srcRect/>
+            <a:stretch>
+              <a:fillRect/>
+            </a:stretch>
+          </p:blipFill>
+          <p:spPr bwMode="auto">
+            <a:xfrm>
+              <a:off x="2500556" y="2775030"/>
+              <a:ext cx="1588844" cy="1588844"/>
+            </a:xfrm>
+            <a:prstGeom prst="rect">
+              <a:avLst/>
+            </a:prstGeom>
+            <a:noFill/>
+            <a:extLst>
+              <a:ext uri="{909E8E84-426E-40DD-AFC4-6F175D3DCCD1}">
+                <a14:hiddenFill xmlns:a14="http://schemas.microsoft.com/office/drawing/2010/main">
+                  <a:solidFill>
+                    <a:srgbClr val="FFFFFF"/>
+                  </a:solidFill>
+                </a14:hiddenFill>
+              </a:ext>
+            </a:extLst>
+          </p:spPr>
+        </p:pic>
+        <p:pic>
+          <p:nvPicPr>
+            <p:cNvPr id="20" name="Picture 19">
+              <a:extLst>
+                <a:ext uri="{FF2B5EF4-FFF2-40B4-BE49-F238E27FC236}">
+                  <a16:creationId xmlns:a16="http://schemas.microsoft.com/office/drawing/2014/main" id="{67E6E7E8-43EF-F707-5B05-D3ECA51D1A8E}"/>
+                </a:ext>
+              </a:extLst>
+            </p:cNvPr>
+            <p:cNvPicPr>
+              <a:picLocks noChangeAspect="1"/>
+            </p:cNvPicPr>
+            <p:nvPr/>
+          </p:nvPicPr>
+          <p:blipFill>
+            <a:blip r:embed="rId7" cstate="print">
+              <a:extLst>
+                <a:ext uri="{28A0092B-C50C-407E-A947-70E740481C1C}">
+                  <a14:useLocalDpi xmlns:a14="http://schemas.microsoft.com/office/drawing/2010/main" val="0"/>
+                </a:ext>
+              </a:extLst>
+            </a:blip>
+            <a:stretch>
+              <a:fillRect/>
+            </a:stretch>
+          </p:blipFill>
+          <p:spPr>
+            <a:xfrm>
+              <a:off x="3066101" y="3053647"/>
+              <a:ext cx="499536" cy="499536"/>
+            </a:xfrm>
+            <a:prstGeom prst="rect">
+              <a:avLst/>
+            </a:prstGeom>
+          </p:spPr>
+        </p:pic>
+      </p:grpSp>
+      <p:grpSp>
+        <p:nvGrpSpPr>
+          <p:cNvPr id="21" name="Group 20">
+            <a:extLst>
+              <a:ext uri="{FF2B5EF4-FFF2-40B4-BE49-F238E27FC236}">
+                <a16:creationId xmlns:a16="http://schemas.microsoft.com/office/drawing/2014/main" id="{BA38A1AE-2A18-7B11-C2DC-1E7B97984F95}"/>
+              </a:ext>
+            </a:extLst>
+          </p:cNvPr>
+          <p:cNvGrpSpPr/>
+          <p:nvPr/>
+        </p:nvGrpSpPr>
+        <p:grpSpPr>
+          <a:xfrm>
+            <a:off x="5015489" y="3463006"/>
+            <a:ext cx="1239422" cy="1170894"/>
+            <a:chOff x="2500556" y="2775030"/>
+            <a:chExt cx="1588844" cy="1588844"/>
+          </a:xfrm>
+        </p:grpSpPr>
+        <p:pic>
+          <p:nvPicPr>
+            <p:cNvPr id="22" name="Picture 4" descr="https://camo.githubusercontent.com/b76dc5557c7cb56ba35b63e709647c11fecae40e/68747470733a2f2f662e636c6f75642e6769746875622e636f6d2f6173736574732f3130383335382f313735373236302f33626332386264342d363637652d313165332d383837632d3231393533633635303261662e706e67">
+              <a:extLst>
+                <a:ext uri="{FF2B5EF4-FFF2-40B4-BE49-F238E27FC236}">
+                  <a16:creationId xmlns:a16="http://schemas.microsoft.com/office/drawing/2014/main" id="{662C492D-9FEE-1B78-AD0A-6DFAE137B617}"/>
+                </a:ext>
+              </a:extLst>
+            </p:cNvPr>
+            <p:cNvPicPr>
+              <a:picLocks noChangeAspect="1" noChangeArrowheads="1"/>
+            </p:cNvPicPr>
+            <p:nvPr/>
+          </p:nvPicPr>
+          <p:blipFill>
+            <a:blip r:embed="rId6" cstate="print">
+              <a:extLst>
+                <a:ext uri="{28A0092B-C50C-407E-A947-70E740481C1C}">
+                  <a14:useLocalDpi xmlns:a14="http://schemas.microsoft.com/office/drawing/2010/main" val="0"/>
+                </a:ext>
+              </a:extLst>
+            </a:blip>
+            <a:srcRect/>
+            <a:stretch>
+              <a:fillRect/>
+            </a:stretch>
+          </p:blipFill>
+          <p:spPr bwMode="auto">
+            <a:xfrm>
+              <a:off x="2500556" y="2775030"/>
+              <a:ext cx="1588844" cy="1588844"/>
+            </a:xfrm>
+            <a:prstGeom prst="rect">
+              <a:avLst/>
+            </a:prstGeom>
+            <a:noFill/>
+            <a:extLst>
+              <a:ext uri="{909E8E84-426E-40DD-AFC4-6F175D3DCCD1}">
+                <a14:hiddenFill xmlns:a14="http://schemas.microsoft.com/office/drawing/2010/main">
+                  <a:solidFill>
+                    <a:srgbClr val="FFFFFF"/>
+                  </a:solidFill>
+                </a14:hiddenFill>
+              </a:ext>
+            </a:extLst>
+          </p:spPr>
+        </p:pic>
+        <p:pic>
+          <p:nvPicPr>
+            <p:cNvPr id="23" name="Picture 22">
+              <a:extLst>
+                <a:ext uri="{FF2B5EF4-FFF2-40B4-BE49-F238E27FC236}">
+                  <a16:creationId xmlns:a16="http://schemas.microsoft.com/office/drawing/2014/main" id="{17365002-224A-AF96-7F73-22A7D22C22A4}"/>
+                </a:ext>
+              </a:extLst>
+            </p:cNvPr>
+            <p:cNvPicPr>
+              <a:picLocks noChangeAspect="1"/>
+            </p:cNvPicPr>
+            <p:nvPr/>
+          </p:nvPicPr>
+          <p:blipFill>
+            <a:blip r:embed="rId7" cstate="print">
+              <a:extLst>
+                <a:ext uri="{28A0092B-C50C-407E-A947-70E740481C1C}">
+                  <a14:useLocalDpi xmlns:a14="http://schemas.microsoft.com/office/drawing/2010/main" val="0"/>
+                </a:ext>
+              </a:extLst>
+            </a:blip>
+            <a:stretch>
+              <a:fillRect/>
+            </a:stretch>
+          </p:blipFill>
+          <p:spPr>
+            <a:xfrm>
+              <a:off x="3066101" y="3053647"/>
+              <a:ext cx="499536" cy="499536"/>
+            </a:xfrm>
+            <a:prstGeom prst="rect">
+              <a:avLst/>
+            </a:prstGeom>
+          </p:spPr>
+        </p:pic>
+      </p:grpSp>
+      <p:sp>
+        <p:nvSpPr>
+          <p:cNvPr id="26" name="TextBox 25">
+            <a:extLst>
+              <a:ext uri="{FF2B5EF4-FFF2-40B4-BE49-F238E27FC236}">
+                <a16:creationId xmlns:a16="http://schemas.microsoft.com/office/drawing/2014/main" id="{0491BA75-96E8-8FF7-F179-53D2C5A90390}"/>
+              </a:ext>
+            </a:extLst>
+          </p:cNvPr>
+          <p:cNvSpPr txBox="1"/>
+          <p:nvPr/>
+        </p:nvSpPr>
+        <p:spPr>
+          <a:xfrm>
+            <a:off x="5084998" y="4257172"/>
+            <a:ext cx="1040461" cy="246221"/>
+          </a:xfrm>
+          <a:prstGeom prst="rect">
+            <a:avLst/>
+          </a:prstGeom>
+          <a:noFill/>
+          <a:ln>
+            <a:noFill/>
+          </a:ln>
+        </p:spPr>
+        <p:txBody>
+          <a:bodyPr wrap="square" rtlCol="0">
+            <a:spAutoFit/>
+          </a:bodyPr>
+          <a:lstStyle/>
+          <a:p>
+            <a:pPr algn="ctr"/>
+            <a:r>
+              <a:rPr lang="en-US" sz="1000" dirty="0"/>
+              <a:t>Less3 Servers</a:t>
+            </a:r>
+            <a:endParaRPr lang="en-US" sz="1000" i="1" dirty="0"/>
+          </a:p>
+        </p:txBody>
+      </p:sp>
+      <p:pic>
+        <p:nvPicPr>
+          <p:cNvPr id="31" name="Picture 30" descr="Database Icons - Free SVG &amp; PNG Database Images - Noun Project">
+            <a:extLst>
+              <a:ext uri="{FF2B5EF4-FFF2-40B4-BE49-F238E27FC236}">
+                <a16:creationId xmlns:a16="http://schemas.microsoft.com/office/drawing/2014/main" id="{38D7268D-82C6-B71C-F607-4331A0F3BB38}"/>
+              </a:ext>
+            </a:extLst>
+          </p:cNvPr>
+          <p:cNvPicPr>
+            <a:picLocks noChangeAspect="1"/>
+          </p:cNvPicPr>
+          <p:nvPr/>
+        </p:nvPicPr>
+        <p:blipFill>
+          <a:blip r:embed="rId8"/>
+          <a:stretch>
+            <a:fillRect/>
+          </a:stretch>
+        </p:blipFill>
+        <p:spPr>
+          <a:xfrm>
+            <a:off x="6468377" y="2808226"/>
+            <a:ext cx="707769" cy="707769"/>
+          </a:xfrm>
+          <a:prstGeom prst="rect">
+            <a:avLst/>
+          </a:prstGeom>
+        </p:spPr>
+      </p:pic>
+      <p:sp>
+        <p:nvSpPr>
+          <p:cNvPr id="33" name="TextBox 32">
+            <a:extLst>
+              <a:ext uri="{FF2B5EF4-FFF2-40B4-BE49-F238E27FC236}">
+                <a16:creationId xmlns:a16="http://schemas.microsoft.com/office/drawing/2014/main" id="{BD4E865E-8AE6-9BA3-5A43-9F68EA1CFC5F}"/>
+              </a:ext>
+            </a:extLst>
+          </p:cNvPr>
+          <p:cNvSpPr txBox="1"/>
+          <p:nvPr/>
+        </p:nvSpPr>
+        <p:spPr>
+          <a:xfrm>
+            <a:off x="6388221" y="3452288"/>
+            <a:ext cx="841500" cy="400110"/>
+          </a:xfrm>
+          <a:prstGeom prst="rect">
+            <a:avLst/>
+          </a:prstGeom>
+          <a:noFill/>
+          <a:ln>
+            <a:noFill/>
+          </a:ln>
+        </p:spPr>
+        <p:txBody>
+          <a:bodyPr wrap="square" rtlCol="0">
+            <a:spAutoFit/>
+          </a:bodyPr>
+          <a:lstStyle/>
+          <a:p>
+            <a:pPr algn="ctr"/>
+            <a:r>
+              <a:rPr lang="en-US" sz="1000" dirty="0"/>
+              <a:t>Shared</a:t>
+            </a:r>
+            <a:br>
+              <a:rPr lang="en-US" sz="1000" dirty="0"/>
+            </a:br>
+            <a:r>
+              <a:rPr lang="en-US" sz="1000" dirty="0"/>
+              <a:t>Database</a:t>
+            </a:r>
+            <a:endParaRPr lang="en-US" sz="1000" i="1" dirty="0"/>
+          </a:p>
+        </p:txBody>
+      </p:sp>
+      <p:pic>
+        <p:nvPicPr>
+          <p:cNvPr id="1026" name="Picture 2" descr="Image result for hard disk icon">
+            <a:extLst>
+              <a:ext uri="{FF2B5EF4-FFF2-40B4-BE49-F238E27FC236}">
+                <a16:creationId xmlns:a16="http://schemas.microsoft.com/office/drawing/2014/main" id="{5EE3A6B0-5DFA-E8EB-03D2-902E533E2E05}"/>
+              </a:ext>
+            </a:extLst>
+          </p:cNvPr>
+          <p:cNvPicPr>
+            <a:picLocks noChangeAspect="1" noChangeArrowheads="1"/>
+          </p:cNvPicPr>
+          <p:nvPr/>
+        </p:nvPicPr>
+        <p:blipFill>
+          <a:blip r:embed="rId9" cstate="print">
+            <a:extLst>
+              <a:ext uri="{28A0092B-C50C-407E-A947-70E740481C1C}">
+                <a14:useLocalDpi xmlns:a14="http://schemas.microsoft.com/office/drawing/2010/main" val="0"/>
+              </a:ext>
+            </a:extLst>
+          </a:blip>
+          <a:srcRect/>
+          <a:stretch>
+            <a:fillRect/>
+          </a:stretch>
+        </p:blipFill>
+        <p:spPr bwMode="auto">
+          <a:xfrm>
+            <a:off x="8399371" y="2538266"/>
+            <a:ext cx="1003684" cy="1003684"/>
+          </a:xfrm>
+          <a:prstGeom prst="rect">
+            <a:avLst/>
+          </a:prstGeom>
+          <a:noFill/>
+          <a:extLst>
+            <a:ext uri="{909E8E84-426E-40DD-AFC4-6F175D3DCCD1}">
+              <a14:hiddenFill xmlns:a14="http://schemas.microsoft.com/office/drawing/2010/main">
+                <a:solidFill>
+                  <a:srgbClr val="FFFFFF"/>
+                </a:solidFill>
+              </a14:hiddenFill>
+            </a:ext>
+          </a:extLst>
+        </p:spPr>
+      </p:pic>
+      <p:sp>
+        <p:nvSpPr>
+          <p:cNvPr id="43" name="TextBox 42">
+            <a:extLst>
+              <a:ext uri="{FF2B5EF4-FFF2-40B4-BE49-F238E27FC236}">
+                <a16:creationId xmlns:a16="http://schemas.microsoft.com/office/drawing/2014/main" id="{94CE6779-B4C0-47CF-3100-5D16B6EC69E7}"/>
+              </a:ext>
+            </a:extLst>
+          </p:cNvPr>
+          <p:cNvSpPr txBox="1"/>
+          <p:nvPr/>
+        </p:nvSpPr>
+        <p:spPr>
+          <a:xfrm>
+            <a:off x="8497054" y="3541950"/>
+            <a:ext cx="808317" cy="369332"/>
+          </a:xfrm>
+          <a:prstGeom prst="rect">
+            <a:avLst/>
+          </a:prstGeom>
+          <a:solidFill>
+            <a:schemeClr val="bg1">
+              <a:lumMod val="75000"/>
+            </a:schemeClr>
+          </a:solidFill>
+        </p:spPr>
+        <p:txBody>
+          <a:bodyPr wrap="square" rtlCol="0">
+            <a:spAutoFit/>
+          </a:bodyPr>
+          <a:lstStyle/>
+          <a:p>
+            <a:pPr algn="ctr"/>
+            <a:r>
+              <a:rPr lang="en-US" sz="900" dirty="0"/>
+              <a:t>Local Disk</a:t>
+            </a:r>
+            <a:br>
+              <a:rPr lang="en-US" sz="900" dirty="0"/>
+            </a:br>
+            <a:r>
+              <a:rPr lang="en-US" sz="900" dirty="0"/>
+              <a:t>Storage</a:t>
+            </a:r>
+            <a:endParaRPr lang="en-US" sz="900" i="1" dirty="0"/>
+          </a:p>
+        </p:txBody>
+      </p:sp>
     </p:spTree>
     <p:extLst>
       <p:ext uri="{BB962C8B-B14F-4D97-AF65-F5344CB8AC3E}">
-        <p14:creationId xmlns:p14="http://schemas.microsoft.com/office/powerpoint/2010/main" val="3516967770"/>
+        <p14:creationId xmlns:p14="http://schemas.microsoft.com/office/powerpoint/2010/main" val="2210593891"/>
       </p:ext>
     </p:extLst>
   </p:cSld>
